--- a/plugins/gradient-cio/assets/examples/gradient-manager-monitor.pptx
+++ b/plugins/gradient-cio/assets/examples/gradient-manager-monitor.pptx
@@ -11793,7 +11793,7 @@
               </a:defRPr>
             </a:pPr>
             <a:r>
-              <a:t>S4 validation: advisory 'empty primary list has no explicit reason' although the response states absence_reason no_open_findings (known issue).</a:t>
+              <a:t>S4 validation: advisory 'empty primary list has no explicit reason' although the response states absence_reason no_open_findings.</a:t>
             </a:r>
           </a:p>
         </p:txBody>
